--- a/artifacts/speaking-portfolio-expanded/talks/evidence-learning/evidence-learning-40min-handout.pptx
+++ b/artifacts/speaking-portfolio-expanded/talks/evidence-learning/evidence-learning-40min-handout.pptx
@@ -201,7 +201,7 @@
                 <a:ea typeface="Arial"/>
                 <a:cs typeface="Arial"/>
               </a:rPr>
-              <a:t xml:space="preserve">[Presenter scripts](../packets/evidence-learning/script-40min.md) · [Packet](../packets/evidence-learning/packet.md) · [Walkthrough](../education/demo.md) · [Evidence](../packets/evidence-learning/evidence-bank.md) · [Procurement route](../packets/evidence-learning/procurement-route.md)</a:t>
+              <a:t xml:space="preserve">[Presenter scripts](script-40min.md) · [Packet](packet.md) · [Walkthrough](demo.md) · [Evidence](evidence-bank.md) · [Procurement route](procurement-route.md)</a:t>
             </a:r>
             <a:endParaRPr lang="en-US" sz="1200"/>
           </a:p>
@@ -247,7 +247,7 @@
                 <a:ea typeface="Arial"/>
                 <a:cs typeface="Arial"/>
               </a:rPr>
-              <a:t xml:space="preserve">Worked example: $100, up 20%, then down 20%. The smudged arithmetic sheet is the K-12 example. [Show Me the Misconception](../packets/evidence-learning/procurement-route.md), the 15-minute procurement route, uses the history-essay example instead, so a program can book both without hearing the percentage fixture twice.</a:t>
+              <a:t xml:space="preserve">Worked example: $100, up 20%, then down 20%. The smudged arithmetic sheet is the K-12 example. [Show Me the Misconception](procurement-route.md), the 15-minute procurement route, uses the history-essay example instead, so a program can book both without hearing the percentage fixture twice.</a:t>
             </a:r>
             <a:endParaRPr lang="en-US" sz="1200"/>
           </a:p>
